--- a/examples/repositories/pradaslides/output/deck.pptx
+++ b/examples/repositories/pradaslides/output/deck.pptx
@@ -507,7 +507,7 @@
           <a:lstStyle/>
           <a:p>
             <a:r>
-              <a:t>架空の町内会を想定した手順案です。実際の貸出規則ではありません。申込みから返却までの確認事項を、借りる人と担当者が同じ順序で使うことを目指します。</a:t>
+              <a:t>架空の町内会を想定した手順案です。実際の貸出規則ではありません。右側は返却まで引き継ぐ記録票の空欄例で、貸出番号・受取数と返却数・返却日時・担当者の確認を残す構成です。</a:t>
             </a:r>
           </a:p>
         </p:txBody>
@@ -647,7 +647,7 @@
           <a:lstStyle/>
           <a:p>
             <a:r>
-              <a:t>借りる人だけで判断せず、担当者と一緒に数、傷や欠品、返却日時と場所を確かめる手順案です。気づいた点は受取り時の記録に残します。</a:t>
+              <a:t>受取りの場面です。申込書と現物の品名・数量・付属品を比べ、貸出前の傷や汚れ、欠品を担当者と記録します。この受取記録を返却の照合に使います。返却時の確認は5頁で分けて説明します。</a:t>
             </a:r>
           </a:p>
         </p:txBody>
@@ -717,7 +717,7 @@
           <a:lstStyle/>
           <a:p>
             <a:r>
-              <a:t>受取り時でも使用中でも、異常に気づいたら使い続けず担当者に知らせる案です。破損の原因や弁償をこの資料で決めるものではなく、実際のルールと担当者の指示を確認します。</a:t>
+              <a:t>異常時は使用を止めて担当者に知らせ、扱いの指示を確認する架空の案です。下の空欄は、品名・数量、気づいた時刻、状態と窓口の指示を残すための記録例です。実際の規則と窓口の指示を優先します。</a:t>
             </a:r>
           </a:p>
         </p:txBody>
@@ -3958,7 +3958,7 @@
         <p:spPr>
           <a:xfrm>
             <a:off x="685800" y="1024128"/>
-            <a:ext cx="10881360" cy="1645920"/>
+            <a:ext cx="7406640" cy="1645920"/>
           </a:xfrm>
           <a:prstGeom prst="rect">
             <a:avLst/>
@@ -4056,7 +4056,7 @@
         <p:spPr>
           <a:xfrm>
             <a:off x="960120" y="3182112"/>
-            <a:ext cx="10058400" cy="1143000"/>
+            <a:ext cx="6675120" cy="1143000"/>
           </a:xfrm>
           <a:prstGeom prst="rect">
             <a:avLst/>
@@ -4111,7 +4111,7 @@
         <p:spPr>
           <a:xfrm>
             <a:off x="713232" y="5257800"/>
-            <a:ext cx="10881360" cy="594360"/>
+            <a:ext cx="7132320" cy="594360"/>
           </a:xfrm>
           <a:prstGeom prst="rect">
             <a:avLst/>
@@ -4128,7 +4128,7 @@
               <a:spcAft>
                 <a:spcPts val="800"/>
               </a:spcAft>
-              <a:defRPr sz="2500" b="0">
+              <a:defRPr sz="2300" b="0">
                 <a:solidFill>
                   <a:srgbClr val="FFFFFF"/>
                 </a:solidFill>
@@ -4136,7 +4136,401 @@
               </a:defRPr>
             </a:pPr>
             <a:r>
-              <a:t>申込み  →  受取り  →  使用  →  返却</a:t>
+              <a:t>申込み → 受取り → 使用 → 返却</a:t>
+            </a:r>
+          </a:p>
+        </p:txBody>
+      </p:sp>
+      <p:sp>
+        <p:nvSpPr>
+          <p:cNvPr id="8" name="Rectangle 7"/>
+          <p:cNvSpPr/>
+          <p:nvPr/>
+        </p:nvSpPr>
+        <p:spPr>
+          <a:xfrm>
+            <a:off x="8321040" y="1847088"/>
+            <a:ext cx="3063240" cy="3950208"/>
+          </a:xfrm>
+          <a:prstGeom prst="rect">
+            <a:avLst/>
+          </a:prstGeom>
+          <a:solidFill>
+            <a:srgbClr val="FFFFFF"/>
+          </a:solidFill>
+          <a:ln>
+            <a:noFill/>
+          </a:ln>
+        </p:spPr>
+        <p:style>
+          <a:lnRef idx="1">
+            <a:schemeClr val="accent1"/>
+          </a:lnRef>
+          <a:fillRef idx="3">
+            <a:schemeClr val="accent1"/>
+          </a:fillRef>
+          <a:effectRef idx="2">
+            <a:schemeClr val="accent1"/>
+          </a:effectRef>
+          <a:fontRef idx="minor">
+            <a:schemeClr val="lt1"/>
+          </a:fontRef>
+        </p:style>
+        <p:txBody>
+          <a:bodyPr rtlCol="0" anchor="ctr"/>
+          <a:lstStyle/>
+          <a:p>
+            <a:pPr algn="ctr"/>
+          </a:p>
+        </p:txBody>
+      </p:sp>
+      <p:sp>
+        <p:nvSpPr>
+          <p:cNvPr id="9" name="TextBox 8"/>
+          <p:cNvSpPr txBox="1"/>
+          <p:nvPr/>
+        </p:nvSpPr>
+        <p:spPr>
+          <a:xfrm>
+            <a:off x="8558784" y="2103120"/>
+            <a:ext cx="2606040" cy="457200"/>
+          </a:xfrm>
+          <a:prstGeom prst="rect">
+            <a:avLst/>
+          </a:prstGeom>
+          <a:noFill/>
+        </p:spPr>
+        <p:txBody>
+          <a:bodyPr wrap="square" lIns="0" rIns="0" tIns="0" bIns="0">
+            <a:spAutoFit/>
+          </a:bodyPr>
+          <a:lstStyle/>
+          <a:p>
+            <a:pPr>
+              <a:spcAft>
+                <a:spcPts val="800"/>
+              </a:spcAft>
+              <a:defRPr sz="2100" b="1">
+                <a:solidFill>
+                  <a:srgbClr val="12324A"/>
+                </a:solidFill>
+                <a:latin typeface="Yu Gothic"/>
+              </a:defRPr>
+            </a:pPr>
+            <a:r>
+              <a:t>返却までの記録</a:t>
+            </a:r>
+          </a:p>
+        </p:txBody>
+      </p:sp>
+      <p:sp>
+        <p:nvSpPr>
+          <p:cNvPr id="10" name="TextBox 9"/>
+          <p:cNvSpPr txBox="1"/>
+          <p:nvPr/>
+        </p:nvSpPr>
+        <p:spPr>
+          <a:xfrm>
+            <a:off x="8558784" y="2743200"/>
+            <a:ext cx="2587752" cy="274320"/>
+          </a:xfrm>
+          <a:prstGeom prst="rect">
+            <a:avLst/>
+          </a:prstGeom>
+          <a:noFill/>
+        </p:spPr>
+        <p:txBody>
+          <a:bodyPr wrap="square" lIns="0" rIns="0" tIns="0" bIns="0">
+            <a:spAutoFit/>
+          </a:bodyPr>
+          <a:lstStyle/>
+          <a:p>
+            <a:pPr>
+              <a:spcAft>
+                <a:spcPts val="800"/>
+              </a:spcAft>
+              <a:defRPr sz="1500" b="1">
+                <a:solidFill>
+                  <a:srgbClr val="B7472A"/>
+                </a:solidFill>
+                <a:latin typeface="Yu Gothic"/>
+              </a:defRPr>
+            </a:pPr>
+            <a:r>
+              <a:t>貸出番号</a:t>
+            </a:r>
+          </a:p>
+        </p:txBody>
+      </p:sp>
+      <p:sp>
+        <p:nvSpPr>
+          <p:cNvPr id="11" name="TextBox 10"/>
+          <p:cNvSpPr txBox="1"/>
+          <p:nvPr/>
+        </p:nvSpPr>
+        <p:spPr>
+          <a:xfrm>
+            <a:off x="8558784" y="3026664"/>
+            <a:ext cx="2587752" cy="320040"/>
+          </a:xfrm>
+          <a:prstGeom prst="rect">
+            <a:avLst/>
+          </a:prstGeom>
+          <a:noFill/>
+        </p:spPr>
+        <p:txBody>
+          <a:bodyPr wrap="square" lIns="0" rIns="0" tIns="0" bIns="0">
+            <a:spAutoFit/>
+          </a:bodyPr>
+          <a:lstStyle/>
+          <a:p>
+            <a:pPr>
+              <a:spcAft>
+                <a:spcPts val="800"/>
+              </a:spcAft>
+              <a:defRPr sz="1700" b="0">
+                <a:solidFill>
+                  <a:srgbClr val="12324A"/>
+                </a:solidFill>
+                <a:latin typeface="Yu Gothic"/>
+              </a:defRPr>
+            </a:pPr>
+            <a:r>
+              <a:t>________________</a:t>
+            </a:r>
+          </a:p>
+        </p:txBody>
+      </p:sp>
+      <p:sp>
+        <p:nvSpPr>
+          <p:cNvPr id="12" name="TextBox 11"/>
+          <p:cNvSpPr txBox="1"/>
+          <p:nvPr/>
+        </p:nvSpPr>
+        <p:spPr>
+          <a:xfrm>
+            <a:off x="8558784" y="3401568"/>
+            <a:ext cx="2587752" cy="274320"/>
+          </a:xfrm>
+          <a:prstGeom prst="rect">
+            <a:avLst/>
+          </a:prstGeom>
+          <a:noFill/>
+        </p:spPr>
+        <p:txBody>
+          <a:bodyPr wrap="square" lIns="0" rIns="0" tIns="0" bIns="0">
+            <a:spAutoFit/>
+          </a:bodyPr>
+          <a:lstStyle/>
+          <a:p>
+            <a:pPr>
+              <a:spcAft>
+                <a:spcPts val="800"/>
+              </a:spcAft>
+              <a:defRPr sz="1500" b="1">
+                <a:solidFill>
+                  <a:srgbClr val="B7472A"/>
+                </a:solidFill>
+                <a:latin typeface="Yu Gothic"/>
+              </a:defRPr>
+            </a:pPr>
+            <a:r>
+              <a:t>受取数 / 返却数</a:t>
+            </a:r>
+          </a:p>
+        </p:txBody>
+      </p:sp>
+      <p:sp>
+        <p:nvSpPr>
+          <p:cNvPr id="13" name="TextBox 12"/>
+          <p:cNvSpPr txBox="1"/>
+          <p:nvPr/>
+        </p:nvSpPr>
+        <p:spPr>
+          <a:xfrm>
+            <a:off x="8558784" y="3685031"/>
+            <a:ext cx="2587752" cy="320040"/>
+          </a:xfrm>
+          <a:prstGeom prst="rect">
+            <a:avLst/>
+          </a:prstGeom>
+          <a:noFill/>
+        </p:spPr>
+        <p:txBody>
+          <a:bodyPr wrap="square" lIns="0" rIns="0" tIns="0" bIns="0">
+            <a:spAutoFit/>
+          </a:bodyPr>
+          <a:lstStyle/>
+          <a:p>
+            <a:pPr>
+              <a:spcAft>
+                <a:spcPts val="800"/>
+              </a:spcAft>
+              <a:defRPr sz="1700" b="0">
+                <a:solidFill>
+                  <a:srgbClr val="12324A"/>
+                </a:solidFill>
+                <a:latin typeface="Yu Gothic"/>
+              </a:defRPr>
+            </a:pPr>
+            <a:r>
+              <a:t>______ / ______</a:t>
+            </a:r>
+          </a:p>
+        </p:txBody>
+      </p:sp>
+      <p:sp>
+        <p:nvSpPr>
+          <p:cNvPr id="14" name="TextBox 13"/>
+          <p:cNvSpPr txBox="1"/>
+          <p:nvPr/>
+        </p:nvSpPr>
+        <p:spPr>
+          <a:xfrm>
+            <a:off x="8558784" y="4059935"/>
+            <a:ext cx="2587752" cy="274320"/>
+          </a:xfrm>
+          <a:prstGeom prst="rect">
+            <a:avLst/>
+          </a:prstGeom>
+          <a:noFill/>
+        </p:spPr>
+        <p:txBody>
+          <a:bodyPr wrap="square" lIns="0" rIns="0" tIns="0" bIns="0">
+            <a:spAutoFit/>
+          </a:bodyPr>
+          <a:lstStyle/>
+          <a:p>
+            <a:pPr>
+              <a:spcAft>
+                <a:spcPts val="800"/>
+              </a:spcAft>
+              <a:defRPr sz="1500" b="1">
+                <a:solidFill>
+                  <a:srgbClr val="B7472A"/>
+                </a:solidFill>
+                <a:latin typeface="Yu Gothic"/>
+              </a:defRPr>
+            </a:pPr>
+            <a:r>
+              <a:t>返す日時</a:t>
+            </a:r>
+          </a:p>
+        </p:txBody>
+      </p:sp>
+      <p:sp>
+        <p:nvSpPr>
+          <p:cNvPr id="15" name="TextBox 14"/>
+          <p:cNvSpPr txBox="1"/>
+          <p:nvPr/>
+        </p:nvSpPr>
+        <p:spPr>
+          <a:xfrm>
+            <a:off x="8558784" y="4343399"/>
+            <a:ext cx="2587752" cy="320040"/>
+          </a:xfrm>
+          <a:prstGeom prst="rect">
+            <a:avLst/>
+          </a:prstGeom>
+          <a:noFill/>
+        </p:spPr>
+        <p:txBody>
+          <a:bodyPr wrap="square" lIns="0" rIns="0" tIns="0" bIns="0">
+            <a:spAutoFit/>
+          </a:bodyPr>
+          <a:lstStyle/>
+          <a:p>
+            <a:pPr>
+              <a:spcAft>
+                <a:spcPts val="800"/>
+              </a:spcAft>
+              <a:defRPr sz="1700" b="0">
+                <a:solidFill>
+                  <a:srgbClr val="12324A"/>
+                </a:solidFill>
+                <a:latin typeface="Yu Gothic"/>
+              </a:defRPr>
+            </a:pPr>
+            <a:r>
+              <a:t>____月____日____時</a:t>
+            </a:r>
+          </a:p>
+        </p:txBody>
+      </p:sp>
+      <p:sp>
+        <p:nvSpPr>
+          <p:cNvPr id="16" name="TextBox 15"/>
+          <p:cNvSpPr txBox="1"/>
+          <p:nvPr/>
+        </p:nvSpPr>
+        <p:spPr>
+          <a:xfrm>
+            <a:off x="8558784" y="4718304"/>
+            <a:ext cx="2587752" cy="274320"/>
+          </a:xfrm>
+          <a:prstGeom prst="rect">
+            <a:avLst/>
+          </a:prstGeom>
+          <a:noFill/>
+        </p:spPr>
+        <p:txBody>
+          <a:bodyPr wrap="square" lIns="0" rIns="0" tIns="0" bIns="0">
+            <a:spAutoFit/>
+          </a:bodyPr>
+          <a:lstStyle/>
+          <a:p>
+            <a:pPr>
+              <a:spcAft>
+                <a:spcPts val="800"/>
+              </a:spcAft>
+              <a:defRPr sz="1500" b="1">
+                <a:solidFill>
+                  <a:srgbClr val="B7472A"/>
+                </a:solidFill>
+                <a:latin typeface="Yu Gothic"/>
+              </a:defRPr>
+            </a:pPr>
+            <a:r>
+              <a:t>担当者の確認</a:t>
+            </a:r>
+          </a:p>
+        </p:txBody>
+      </p:sp>
+      <p:sp>
+        <p:nvSpPr>
+          <p:cNvPr id="17" name="TextBox 16"/>
+          <p:cNvSpPr txBox="1"/>
+          <p:nvPr/>
+        </p:nvSpPr>
+        <p:spPr>
+          <a:xfrm>
+            <a:off x="8558784" y="5001768"/>
+            <a:ext cx="2587752" cy="320040"/>
+          </a:xfrm>
+          <a:prstGeom prst="rect">
+            <a:avLst/>
+          </a:prstGeom>
+          <a:noFill/>
+        </p:spPr>
+        <p:txBody>
+          <a:bodyPr wrap="square" lIns="0" rIns="0" tIns="0" bIns="0">
+            <a:spAutoFit/>
+          </a:bodyPr>
+          <a:lstStyle/>
+          <a:p>
+            <a:pPr>
+              <a:spcAft>
+                <a:spcPts val="800"/>
+              </a:spcAft>
+              <a:defRPr sz="1700" b="0">
+                <a:solidFill>
+                  <a:srgbClr val="12324A"/>
+                </a:solidFill>
+                <a:latin typeface="Yu Gothic"/>
+              </a:defRPr>
+            </a:pPr>
+            <a:r>
+              <a:t>□ 返却確認済み</a:t>
             </a:r>
           </a:p>
         </p:txBody>
@@ -5027,7 +5421,7 @@
               </a:defRPr>
             </a:pPr>
             <a:r>
-              <a:t>数と状態を、その場で一緒に確認する</a:t>
+              <a:t>受取りは、記録と現物を照合する</a:t>
             </a:r>
           </a:p>
         </p:txBody>
@@ -5148,7 +5542,7 @@
               </a:defRPr>
             </a:pPr>
             <a:r>
-              <a:t>数を数える</a:t>
+              <a:t>品名と数を照合</a:t>
             </a:r>
           </a:p>
         </p:txBody>
@@ -5187,7 +5581,7 @@
               </a:defRPr>
             </a:pPr>
             <a:r>
-              <a:t>借りる品と付属品を</a:t>
+              <a:t>申込書と現物の</a:t>
             </a:r>
           </a:p>
           <a:p>
@@ -5203,7 +5597,7 @@
               </a:defRPr>
             </a:pPr>
             <a:r>
-              <a:t>記録に照らす</a:t>
+              <a:t>数量・付属品を比べる</a:t>
             </a:r>
           </a:p>
         </p:txBody>
@@ -5324,7 +5718,7 @@
               </a:defRPr>
             </a:pPr>
             <a:r>
-              <a:t>状態を見る</a:t>
+              <a:t>貸出前の状態</a:t>
             </a:r>
           </a:p>
         </p:txBody>
@@ -5379,7 +5773,7 @@
               </a:defRPr>
             </a:pPr>
             <a:r>
-              <a:t>担当者と確かめる</a:t>
+              <a:t>担当者と記録する</a:t>
             </a:r>
           </a:p>
         </p:txBody>
@@ -5500,7 +5894,7 @@
               </a:defRPr>
             </a:pPr>
             <a:r>
-              <a:t>返却を確認</a:t>
+              <a:t>受取記録を保存</a:t>
             </a:r>
           </a:p>
         </p:txBody>
@@ -5539,7 +5933,7 @@
               </a:defRPr>
             </a:pPr>
             <a:r>
-              <a:t>返す日時と場所を</a:t>
+              <a:t>受取数・状態・担当者を</a:t>
             </a:r>
           </a:p>
           <a:p>
@@ -5555,7 +5949,7 @@
               </a:defRPr>
             </a:pPr>
             <a:r>
-              <a:t>記録に残す</a:t>
+              <a:t>返却時まで残す</a:t>
             </a:r>
           </a:p>
         </p:txBody>
@@ -5594,7 +5988,7 @@
               </a:defRPr>
             </a:pPr>
             <a:r>
-              <a:t>気づいた点は、持ち帰る前に伝える。</a:t>
+              <a:t>受取記録を、返却時の照合に使う。</a:t>
             </a:r>
           </a:p>
         </p:txBody>
@@ -5750,7 +6144,7 @@
         </p:nvSpPr>
         <p:spPr>
           <a:xfrm>
-            <a:off x="731520" y="2468880"/>
+            <a:off x="731520" y="2066543"/>
             <a:ext cx="5303520" cy="548640"/>
           </a:xfrm>
           <a:prstGeom prst="rect">
@@ -5789,7 +6183,7 @@
         </p:nvSpPr>
         <p:spPr>
           <a:xfrm>
-            <a:off x="731520" y="3163824"/>
+            <a:off x="731520" y="2706624"/>
             <a:ext cx="5303520" cy="594360"/>
           </a:xfrm>
           <a:prstGeom prst="rect">
@@ -5828,7 +6222,7 @@
         </p:nvSpPr>
         <p:spPr>
           <a:xfrm>
-            <a:off x="6537959" y="2468880"/>
+            <a:off x="6537959" y="2066543"/>
             <a:ext cx="5303520" cy="548640"/>
           </a:xfrm>
           <a:prstGeom prst="rect">
@@ -5867,7 +6261,7 @@
         </p:nvSpPr>
         <p:spPr>
           <a:xfrm>
-            <a:off x="6537959" y="3163824"/>
+            <a:off x="6537959" y="2706624"/>
             <a:ext cx="5303520" cy="594360"/>
           </a:xfrm>
           <a:prstGeom prst="rect">
@@ -5906,7 +6300,7 @@
         </p:nvSpPr>
         <p:spPr>
           <a:xfrm>
-            <a:off x="731520" y="4315968"/>
+            <a:off x="731520" y="3511296"/>
             <a:ext cx="10698480" cy="18288"/>
           </a:xfrm>
           <a:prstGeom prst="rect">
@@ -5949,8 +6343,8 @@
         </p:nvSpPr>
         <p:spPr>
           <a:xfrm>
-            <a:off x="731520" y="4645152"/>
-            <a:ext cx="10789920" cy="1051560"/>
+            <a:off x="731520" y="3703320"/>
+            <a:ext cx="10789920" cy="594360"/>
           </a:xfrm>
           <a:prstGeom prst="rect">
             <a:avLst/>
@@ -5975,23 +6369,206 @@
               </a:defRPr>
             </a:pPr>
             <a:r>
-              <a:t>使い続けず、担当者に知らせる。</a:t>
-            </a:r>
-          </a:p>
+              <a:t>使用を止め、窓口へ。扱いを確認する。</a:t>
+            </a:r>
+          </a:p>
+        </p:txBody>
+      </p:sp>
+      <p:sp>
+        <p:nvSpPr>
+          <p:cNvPr id="11" name="Rectangle 10"/>
+          <p:cNvSpPr/>
+          <p:nvPr/>
+        </p:nvSpPr>
+        <p:spPr>
+          <a:xfrm>
+            <a:off x="731520" y="4590288"/>
+            <a:ext cx="10698480" cy="1453896"/>
+          </a:xfrm>
+          <a:prstGeom prst="rect">
+            <a:avLst/>
+          </a:prstGeom>
+          <a:solidFill>
+            <a:srgbClr val="FFFFFF"/>
+          </a:solidFill>
+          <a:ln>
+            <a:noFill/>
+          </a:ln>
+        </p:spPr>
+        <p:style>
+          <a:lnRef idx="1">
+            <a:schemeClr val="accent1"/>
+          </a:lnRef>
+          <a:fillRef idx="3">
+            <a:schemeClr val="accent1"/>
+          </a:fillRef>
+          <a:effectRef idx="2">
+            <a:schemeClr val="accent1"/>
+          </a:effectRef>
+          <a:fontRef idx="minor">
+            <a:schemeClr val="lt1"/>
+          </a:fontRef>
+        </p:style>
+        <p:txBody>
+          <a:bodyPr rtlCol="0" anchor="ctr"/>
+          <a:lstStyle/>
+          <a:p>
+            <a:pPr algn="ctr"/>
+          </a:p>
+        </p:txBody>
+      </p:sp>
+      <p:sp>
+        <p:nvSpPr>
+          <p:cNvPr id="12" name="TextBox 11"/>
+          <p:cNvSpPr txBox="1"/>
+          <p:nvPr/>
+        </p:nvSpPr>
+        <p:spPr>
+          <a:xfrm>
+            <a:off x="941832" y="4690872"/>
+            <a:ext cx="10149840" cy="310896"/>
+          </a:xfrm>
+          <a:prstGeom prst="rect">
+            <a:avLst/>
+          </a:prstGeom>
+          <a:noFill/>
+        </p:spPr>
+        <p:txBody>
+          <a:bodyPr wrap="square" lIns="0" rIns="0" tIns="0" bIns="0">
+            <a:spAutoFit/>
+          </a:bodyPr>
+          <a:lstStyle/>
           <a:p>
             <a:pPr>
               <a:spcAft>
                 <a:spcPts val="800"/>
               </a:spcAft>
-              <a:defRPr sz="2800" b="1">
-                <a:solidFill>
-                  <a:srgbClr val="FFFFFF"/>
+              <a:defRPr sz="1800" b="1">
+                <a:solidFill>
+                  <a:srgbClr val="B7472A"/>
                 </a:solidFill>
                 <a:latin typeface="Yu Gothic"/>
               </a:defRPr>
             </a:pPr>
             <a:r>
-              <a:t>その後の扱いを確認する。</a:t>
+              <a:t>窓口へ伝える記録</a:t>
+            </a:r>
+          </a:p>
+        </p:txBody>
+      </p:sp>
+      <p:sp>
+        <p:nvSpPr>
+          <p:cNvPr id="13" name="TextBox 12"/>
+          <p:cNvSpPr txBox="1"/>
+          <p:nvPr/>
+        </p:nvSpPr>
+        <p:spPr>
+          <a:xfrm>
+            <a:off x="941832" y="5166360"/>
+            <a:ext cx="4846320" cy="347472"/>
+          </a:xfrm>
+          <a:prstGeom prst="rect">
+            <a:avLst/>
+          </a:prstGeom>
+          <a:noFill/>
+        </p:spPr>
+        <p:txBody>
+          <a:bodyPr wrap="square" lIns="0" rIns="0" tIns="0" bIns="0">
+            <a:spAutoFit/>
+          </a:bodyPr>
+          <a:lstStyle/>
+          <a:p>
+            <a:pPr>
+              <a:spcAft>
+                <a:spcPts val="800"/>
+              </a:spcAft>
+              <a:defRPr sz="2000" b="0">
+                <a:solidFill>
+                  <a:srgbClr val="12324A"/>
+                </a:solidFill>
+                <a:latin typeface="Yu Gothic"/>
+              </a:defRPr>
+            </a:pPr>
+            <a:r>
+              <a:t>品名・数量  ______________</a:t>
+            </a:r>
+          </a:p>
+        </p:txBody>
+      </p:sp>
+      <p:sp>
+        <p:nvSpPr>
+          <p:cNvPr id="14" name="TextBox 13"/>
+          <p:cNvSpPr txBox="1"/>
+          <p:nvPr/>
+        </p:nvSpPr>
+        <p:spPr>
+          <a:xfrm>
+            <a:off x="6217920" y="5166360"/>
+            <a:ext cx="4937760" cy="347472"/>
+          </a:xfrm>
+          <a:prstGeom prst="rect">
+            <a:avLst/>
+          </a:prstGeom>
+          <a:noFill/>
+        </p:spPr>
+        <p:txBody>
+          <a:bodyPr wrap="square" lIns="0" rIns="0" tIns="0" bIns="0">
+            <a:spAutoFit/>
+          </a:bodyPr>
+          <a:lstStyle/>
+          <a:p>
+            <a:pPr>
+              <a:spcAft>
+                <a:spcPts val="800"/>
+              </a:spcAft>
+              <a:defRPr sz="2000" b="0">
+                <a:solidFill>
+                  <a:srgbClr val="12324A"/>
+                </a:solidFill>
+                <a:latin typeface="Yu Gothic"/>
+              </a:defRPr>
+            </a:pPr>
+            <a:r>
+              <a:t>気づいた時刻  ____________</a:t>
+            </a:r>
+          </a:p>
+        </p:txBody>
+      </p:sp>
+      <p:sp>
+        <p:nvSpPr>
+          <p:cNvPr id="15" name="TextBox 14"/>
+          <p:cNvSpPr txBox="1"/>
+          <p:nvPr/>
+        </p:nvSpPr>
+        <p:spPr>
+          <a:xfrm>
+            <a:off x="941832" y="5605272"/>
+            <a:ext cx="10149840" cy="347472"/>
+          </a:xfrm>
+          <a:prstGeom prst="rect">
+            <a:avLst/>
+          </a:prstGeom>
+          <a:noFill/>
+        </p:spPr>
+        <p:txBody>
+          <a:bodyPr wrap="square" lIns="0" rIns="0" tIns="0" bIns="0">
+            <a:spAutoFit/>
+          </a:bodyPr>
+          <a:lstStyle/>
+          <a:p>
+            <a:pPr>
+              <a:spcAft>
+                <a:spcPts val="800"/>
+              </a:spcAft>
+              <a:defRPr sz="2000" b="0">
+                <a:solidFill>
+                  <a:srgbClr val="12324A"/>
+                </a:solidFill>
+                <a:latin typeface="Yu Gothic"/>
+              </a:defRPr>
+            </a:pPr>
+            <a:r>
+              <a:t>状態・窓口の指示  ___________________________________</a:t>
             </a:r>
           </a:p>
         </p:txBody>
@@ -6190,8 +6767,8 @@
         </p:nvSpPr>
         <p:spPr>
           <a:xfrm>
-            <a:off x="932688" y="2295144"/>
-            <a:ext cx="1554480" cy="411480"/>
+            <a:off x="932688" y="2194560"/>
+            <a:ext cx="1554480" cy="676656"/>
           </a:xfrm>
           <a:prstGeom prst="rect">
             <a:avLst/>
@@ -6199,14 +6776,14 @@
           <a:noFill/>
         </p:spPr>
         <p:txBody>
-          <a:bodyPr wrap="square" lIns="0" rIns="0" tIns="0" bIns="0">
+          <a:bodyPr wrap="square" lIns="0" rIns="0" tIns="0" bIns="0" anchor="ctr">
             <a:spAutoFit/>
           </a:bodyPr>
           <a:lstStyle/>
           <a:p>
             <a:pPr>
               <a:spcAft>
-                <a:spcPts val="800"/>
+                <a:spcPts val="0"/>
               </a:spcAft>
               <a:defRPr sz="2300" b="1">
                 <a:solidFill>
@@ -6354,8 +6931,8 @@
         </p:nvSpPr>
         <p:spPr>
           <a:xfrm>
-            <a:off x="932688" y="3099815"/>
-            <a:ext cx="1554480" cy="411480"/>
+            <a:off x="932688" y="2999232"/>
+            <a:ext cx="1554480" cy="676656"/>
           </a:xfrm>
           <a:prstGeom prst="rect">
             <a:avLst/>
@@ -6363,14 +6940,14 @@
           <a:noFill/>
         </p:spPr>
         <p:txBody>
-          <a:bodyPr wrap="square" lIns="0" rIns="0" tIns="0" bIns="0">
+          <a:bodyPr wrap="square" lIns="0" rIns="0" tIns="0" bIns="0" anchor="ctr">
             <a:spAutoFit/>
           </a:bodyPr>
           <a:lstStyle/>
           <a:p>
             <a:pPr>
               <a:spcAft>
-                <a:spcPts val="800"/>
+                <a:spcPts val="0"/>
               </a:spcAft>
               <a:defRPr sz="2300" b="1">
                 <a:solidFill>
@@ -6518,8 +7095,8 @@
         </p:nvSpPr>
         <p:spPr>
           <a:xfrm>
-            <a:off x="932688" y="3904488"/>
-            <a:ext cx="1554480" cy="411480"/>
+            <a:off x="932688" y="3803904"/>
+            <a:ext cx="1554480" cy="676656"/>
           </a:xfrm>
           <a:prstGeom prst="rect">
             <a:avLst/>
@@ -6527,14 +7104,14 @@
           <a:noFill/>
         </p:spPr>
         <p:txBody>
-          <a:bodyPr wrap="square" lIns="0" rIns="0" tIns="0" bIns="0">
+          <a:bodyPr wrap="square" lIns="0" rIns="0" tIns="0" bIns="0" anchor="ctr">
             <a:spAutoFit/>
           </a:bodyPr>
           <a:lstStyle/>
           <a:p>
             <a:pPr>
               <a:spcAft>
-                <a:spcPts val="800"/>
+                <a:spcPts val="0"/>
               </a:spcAft>
               <a:defRPr sz="2300" b="1">
                 <a:solidFill>
@@ -6682,8 +7259,8 @@
         </p:nvSpPr>
         <p:spPr>
           <a:xfrm>
-            <a:off x="932688" y="4709160"/>
-            <a:ext cx="1554480" cy="411480"/>
+            <a:off x="932688" y="4608576"/>
+            <a:ext cx="1554480" cy="676656"/>
           </a:xfrm>
           <a:prstGeom prst="rect">
             <a:avLst/>
@@ -6691,14 +7268,14 @@
           <a:noFill/>
         </p:spPr>
         <p:txBody>
-          <a:bodyPr wrap="square" lIns="0" rIns="0" tIns="0" bIns="0">
+          <a:bodyPr wrap="square" lIns="0" rIns="0" tIns="0" bIns="0" anchor="ctr">
             <a:spAutoFit/>
           </a:bodyPr>
           <a:lstStyle/>
           <a:p>
             <a:pPr>
               <a:spcAft>
-                <a:spcPts val="800"/>
+                <a:spcPts val="0"/>
               </a:spcAft>
               <a:defRPr sz="2300" b="1">
                 <a:solidFill>
